--- a/presentation/NeuroPlast_final_review.pptx
+++ b/presentation/NeuroPlast_final_review.pptx
@@ -1083,7 +1083,7 @@
           <a:lstStyle/>
           <a:p>
             <a:r>
-              <a:t>This slide is, I think, the most useful part of the project. Six findings looked positive early on, and each shrank or disappeared once the right control was in place. Sleep beating replay came from three seeds and from sleep replaying more data. Shared weights looked far more efficient only because the replay buffer was not counted as memory. Sleep beating isolation on five tasks came from a training budget too small for fresh networks. The two homeostasis results came from small seed counts, and the Transformer result came from a benchmark that did not need memory at all. The common pattern: each apparent win disappeared when the resource it quietly used more of, whether seeds, frames, memory or replayed samples, was matched.</a:t>
+              <a:t>This slide is, I think, the most useful part of the project. Six findings looked positive early on, and each shrank or disappeared once the right control was in place. Sleep beating replay came from three seeds and from sleep replaying more data. Shared weights looked far more efficient only because the replay buffer was not counted as memory. Sleep beating isolation on five tasks came from a training budget too small for fresh networks. The two homeostasis results came from small seed counts, and the Transformer result came from a benchmark that did not need memory at all. The common pattern: the effects shrank or disappeared once the seed counts, training budgets, replay budgets and memory accounting were made fair. The one that survived is the speed-up homeostasis gives DFA, in its area-under-the-curve, not its solve rate.</a:t>
             </a:r>
           </a:p>
         </p:txBody>
@@ -1223,7 +1223,7 @@
           <a:lstStyle/>
           <a:p>
             <a:r>
-              <a:t>The limitations are real. The agent is told which task it is doing, the scale is small, many continual arms have only 3 seeds, the energy numbers are estimates, and the Transformer question is untested because no memory benchmark was learnable within budget. For future work, the most direct next step is a memory benchmark that agents can actually learn. The idea I find most promising is compressed replay: since the size of the replay buffer is what decides whether a shared network beats one network per task, making the buffer cheaper moves that trade-off directly, for example by storing quantised targets, fewer but better-chosen states, or a small generative model. This is an idea, not a result.</a:t>
+              <a:t>The limitations are real. The agent is told which task it is doing, the scale is small, many continual arms have only 3 seeds, the energy numbers are estimates, and the Transformer question is untested because no benchmark we tried both required memory and was learnable within budget. For future work, the most direct next step is a memory benchmark that agents can actually learn. The idea I find most promising is compressed replay: since the size of the replay buffer is what decides whether a shared network beats one network per task, making the buffer cheaper moves that trade-off directly, for example by storing quantised targets, fewer but better-chosen states, or a small generative model. This is an idea, not a result.</a:t>
             </a:r>
           </a:p>
         </p:txBody>
@@ -1293,7 +1293,7 @@
           <a:lstStyle/>
           <a:p>
             <a:r>
-              <a:t>To conclude. None of the brain-inspired mechanisms beat its matched control on accuracy or forgetting. There are two specific exceptions: homeostasis speeds up learning when the network is trained without backprop, and a shared network is more memory-efficient than one network per task when the replay buffer is small. The broader lesson is methodological: in this project, every apparent win of a biological mechanism disappeared once I matched the resource it was quietly using more of. My suggestion for this field is to report and match those budgets. Thank you; I'm happy to take questions. There are backup slides with the full tables and references.</a:t>
+              <a:t>To conclude. None of the brain-inspired mechanisms beat its matched control on accuracy or forgetting. There are two specific exceptions: homeostasis speeds up learning when the network is trained without backprop, and with a small replay buffer a shared network reaches a similar mean accuracy to one network per task in less than half the memory, although with three seeds that interval is wide. The broader lesson is methodological: in this project, effects shrank or disappeared once seed counts, training budgets, replay budgets and memory accounting were made fair; the speed-up homeostasis gives DFA is the one that survived. My suggestion for this field is to report and match those budgets. Thank you; I'm happy to take questions. There are backup slides with the full tables and references.</a:t>
             </a:r>
           </a:p>
         </p:txBody>
@@ -1993,7 +1993,7 @@
           <a:lstStyle/>
           <a:p>
             <a:r>
-              <a:t>This is the whole result on one slide. Three mechanisms had no effect beyond their control: STDP, which was indistinguishable from a random update of the same size; homeostasis with ordinary backprop, which looked positive but did not survive the multiple-comparison correction; and sleep, which removes forgetting but ties replay once the replay budget is matched. The spiking encoder is a trade-off: it works at fewer operations, but costs more CPU time to train and the energy savings are only an estimate. The two exceptions are homeostasis when the network is trained without backprop, and one shared network when the replay buffer is small. The Transformer question could not be tested. The next slides go through each row.</a:t>
+              <a:t>This is the whole result on one slide. Three mechanisms had no effect beyond their control: STDP, which was indistinguishable from a random update of the same size; homeostasis with ordinary backprop, which looked positive but did not survive the multiple-comparison correction; and sleep, which removes forgetting but ties replay once the replay budget is matched. The spiking encoder is a trade-off: it works at fewer operations, but costs more CPU time to train and the energy savings are only an estimate. The two exceptions are homeostasis when the network is trained without backprop, and one shared network with a small replay buffer, which reaches a similar mean accuracy in less than half the memory, with only three seeds and a wide interval. The Transformer question could not be tested. The next slides go through each row.</a:t>
             </a:r>
           </a:p>
         </p:txBody>
@@ -2133,7 +2133,7 @@
           <a:lstStyle/>
           <a:p>
             <a:r>
-              <a:t>Isolation, one network per task, never forgets by construction, so the fair question is memory. Per parameter, the shared network looks 2.5–3.3 times more efficient, which is the usual way this is reported. But the shared network needs a replay buffer, and at the default 5,000 states per task the buffer outweighs the extra networks: isolation gets 1.8–2.9 times more accuracy per megabyte. The exception is a small buffer: on the SNN, sleep with 200 states per task ties isolation's accuracy, 0.838 against 0.833, in 0.89 instead of 1.92 megabytes, about 46 percent of the memory. With three seeds the confidence interval is wide, so this is 'no large difference', not proof of equality.</a:t>
+              <a:t>Isolation, one network per task, never forgets by construction, so the fair question is memory. Per parameter, the shared network looks 2.5–3.3 times more efficient, which is the usual way this is reported. But the shared network needs a replay buffer, and at the default 5,000 states per task the buffer outweighs the extra networks: isolation gets 1.8–2.9 times more accuracy per megabyte. The exception is a small buffer: on the SNN, sleep with 200 states per task reaches a similar mean accuracy to isolation, 0.838 against 0.833, in 0.89 instead of 1.92 megabytes, about 46 percent of the memory. But this is 3 seeds per arm, and the 95 percent interval for the difference runs from −0.167 to +0.177, so it is a similar mean, not evidence of equal accuracy.</a:t>
             </a:r>
           </a:p>
         </p:txBody>
@@ -5557,8 +5557,8 @@
         </p:blipFill>
         <p:spPr>
           <a:xfrm>
-            <a:off x="457200" y="1832956"/>
-            <a:ext cx="7223760" cy="3283527"/>
+            <a:off x="457200" y="1832561"/>
+            <a:ext cx="7223759" cy="3284316"/>
           </a:xfrm>
           <a:prstGeom prst="rect">
             <a:avLst/>
@@ -5925,8 +5925,8 @@
         </p:blipFill>
         <p:spPr>
           <a:xfrm>
-            <a:off x="457200" y="1840868"/>
-            <a:ext cx="7589520" cy="2993382"/>
+            <a:off x="457200" y="1839680"/>
+            <a:ext cx="7589520" cy="2995759"/>
           </a:xfrm>
           <a:prstGeom prst="rect">
             <a:avLst/>
@@ -6504,8 +6504,8 @@
         </p:nvSpPr>
         <p:spPr>
           <a:xfrm>
-            <a:off x="548640" y="2057400"/>
-            <a:ext cx="11094415" cy="548640"/>
+            <a:off x="548640" y="2029968"/>
+            <a:ext cx="11094415" cy="512064"/>
           </a:xfrm>
           <a:prstGeom prst="roundRect">
             <a:avLst>
@@ -6548,8 +6548,8 @@
         </p:nvSpPr>
         <p:spPr>
           <a:xfrm>
-            <a:off x="685800" y="2057400"/>
-            <a:ext cx="3108960" cy="548640"/>
+            <a:off x="685800" y="2029968"/>
+            <a:ext cx="3108960" cy="512064"/>
           </a:xfrm>
           <a:prstGeom prst="rect">
             <a:avLst/>
@@ -6583,8 +6583,8 @@
         </p:nvSpPr>
         <p:spPr>
           <a:xfrm>
-            <a:off x="4069080" y="2057400"/>
-            <a:ext cx="2194560" cy="548640"/>
+            <a:off x="4069080" y="2029968"/>
+            <a:ext cx="2194560" cy="512064"/>
           </a:xfrm>
           <a:prstGeom prst="rect">
             <a:avLst/>
@@ -6618,8 +6618,8 @@
         </p:nvSpPr>
         <p:spPr>
           <a:xfrm>
-            <a:off x="6537960" y="2057400"/>
-            <a:ext cx="3154679" cy="548640"/>
+            <a:off x="6537960" y="2029968"/>
+            <a:ext cx="3154679" cy="512064"/>
           </a:xfrm>
           <a:prstGeom prst="rect">
             <a:avLst/>
@@ -6653,8 +6653,8 @@
         </p:nvSpPr>
         <p:spPr>
           <a:xfrm>
-            <a:off x="9966960" y="2057400"/>
-            <a:ext cx="1630375" cy="548640"/>
+            <a:off x="9966960" y="2029968"/>
+            <a:ext cx="1630375" cy="512064"/>
           </a:xfrm>
           <a:prstGeom prst="rect">
             <a:avLst/>
@@ -6688,8 +6688,8 @@
         </p:nvSpPr>
         <p:spPr>
           <a:xfrm>
-            <a:off x="548640" y="2697480"/>
-            <a:ext cx="11094415" cy="548640"/>
+            <a:off x="548640" y="2633472"/>
+            <a:ext cx="11094415" cy="512064"/>
           </a:xfrm>
           <a:prstGeom prst="roundRect">
             <a:avLst>
@@ -6732,8 +6732,8 @@
         </p:nvSpPr>
         <p:spPr>
           <a:xfrm>
-            <a:off x="685800" y="2697480"/>
-            <a:ext cx="3108960" cy="548640"/>
+            <a:off x="685800" y="2633472"/>
+            <a:ext cx="3108960" cy="512064"/>
           </a:xfrm>
           <a:prstGeom prst="rect">
             <a:avLst/>
@@ -6767,8 +6767,8 @@
         </p:nvSpPr>
         <p:spPr>
           <a:xfrm>
-            <a:off x="4069080" y="2697480"/>
-            <a:ext cx="2194560" cy="548640"/>
+            <a:off x="4069080" y="2633472"/>
+            <a:ext cx="2194560" cy="512064"/>
           </a:xfrm>
           <a:prstGeom prst="rect">
             <a:avLst/>
@@ -6802,8 +6802,8 @@
         </p:nvSpPr>
         <p:spPr>
           <a:xfrm>
-            <a:off x="6537960" y="2697480"/>
-            <a:ext cx="3154679" cy="548640"/>
+            <a:off x="6537960" y="2633472"/>
+            <a:ext cx="3154679" cy="512064"/>
           </a:xfrm>
           <a:prstGeom prst="rect">
             <a:avLst/>
@@ -6837,8 +6837,8 @@
         </p:nvSpPr>
         <p:spPr>
           <a:xfrm>
-            <a:off x="9966960" y="2697480"/>
-            <a:ext cx="1630375" cy="548640"/>
+            <a:off x="9966960" y="2633472"/>
+            <a:ext cx="1630375" cy="512064"/>
           </a:xfrm>
           <a:prstGeom prst="rect">
             <a:avLst/>
@@ -6872,8 +6872,8 @@
         </p:nvSpPr>
         <p:spPr>
           <a:xfrm>
-            <a:off x="548640" y="3337560"/>
-            <a:ext cx="11094415" cy="548640"/>
+            <a:off x="548640" y="3236976"/>
+            <a:ext cx="11094415" cy="512064"/>
           </a:xfrm>
           <a:prstGeom prst="roundRect">
             <a:avLst>
@@ -6916,8 +6916,8 @@
         </p:nvSpPr>
         <p:spPr>
           <a:xfrm>
-            <a:off x="685800" y="3337560"/>
-            <a:ext cx="3108960" cy="548640"/>
+            <a:off x="685800" y="3236976"/>
+            <a:ext cx="3108960" cy="512064"/>
           </a:xfrm>
           <a:prstGeom prst="rect">
             <a:avLst/>
@@ -6951,8 +6951,8 @@
         </p:nvSpPr>
         <p:spPr>
           <a:xfrm>
-            <a:off x="4069080" y="3337560"/>
-            <a:ext cx="2194560" cy="548640"/>
+            <a:off x="4069080" y="3236976"/>
+            <a:ext cx="2194560" cy="512064"/>
           </a:xfrm>
           <a:prstGeom prst="rect">
             <a:avLst/>
@@ -6986,8 +6986,8 @@
         </p:nvSpPr>
         <p:spPr>
           <a:xfrm>
-            <a:off x="6537960" y="3337560"/>
-            <a:ext cx="3154679" cy="548640"/>
+            <a:off x="6537960" y="3236976"/>
+            <a:ext cx="3154679" cy="512064"/>
           </a:xfrm>
           <a:prstGeom prst="rect">
             <a:avLst/>
@@ -7021,8 +7021,8 @@
         </p:nvSpPr>
         <p:spPr>
           <a:xfrm>
-            <a:off x="9966960" y="3337560"/>
-            <a:ext cx="1630375" cy="548640"/>
+            <a:off x="9966960" y="3236976"/>
+            <a:ext cx="1630375" cy="512064"/>
           </a:xfrm>
           <a:prstGeom prst="rect">
             <a:avLst/>
@@ -7056,8 +7056,8 @@
         </p:nvSpPr>
         <p:spPr>
           <a:xfrm>
-            <a:off x="548640" y="3977639"/>
-            <a:ext cx="11094415" cy="548640"/>
+            <a:off x="548640" y="3840480"/>
+            <a:ext cx="11094415" cy="512064"/>
           </a:xfrm>
           <a:prstGeom prst="roundRect">
             <a:avLst>
@@ -7100,8 +7100,8 @@
         </p:nvSpPr>
         <p:spPr>
           <a:xfrm>
-            <a:off x="685800" y="3977639"/>
-            <a:ext cx="3108960" cy="548640"/>
+            <a:off x="685800" y="3840480"/>
+            <a:ext cx="3108960" cy="512064"/>
           </a:xfrm>
           <a:prstGeom prst="rect">
             <a:avLst/>
@@ -7135,8 +7135,8 @@
         </p:nvSpPr>
         <p:spPr>
           <a:xfrm>
-            <a:off x="4069080" y="3977639"/>
-            <a:ext cx="2194560" cy="548640"/>
+            <a:off x="4069080" y="3840480"/>
+            <a:ext cx="2194560" cy="512064"/>
           </a:xfrm>
           <a:prstGeom prst="rect">
             <a:avLst/>
@@ -7170,8 +7170,8 @@
         </p:nvSpPr>
         <p:spPr>
           <a:xfrm>
-            <a:off x="6537960" y="3977639"/>
-            <a:ext cx="3154679" cy="548640"/>
+            <a:off x="6537960" y="3840480"/>
+            <a:ext cx="3154679" cy="512064"/>
           </a:xfrm>
           <a:prstGeom prst="rect">
             <a:avLst/>
@@ -7205,8 +7205,8 @@
         </p:nvSpPr>
         <p:spPr>
           <a:xfrm>
-            <a:off x="9966960" y="3977639"/>
-            <a:ext cx="1630375" cy="548640"/>
+            <a:off x="9966960" y="3840480"/>
+            <a:ext cx="1630375" cy="512064"/>
           </a:xfrm>
           <a:prstGeom prst="rect">
             <a:avLst/>
@@ -7240,8 +7240,8 @@
         </p:nvSpPr>
         <p:spPr>
           <a:xfrm>
-            <a:off x="548640" y="4617720"/>
-            <a:ext cx="11094415" cy="548640"/>
+            <a:off x="548640" y="4443984"/>
+            <a:ext cx="11094415" cy="512064"/>
           </a:xfrm>
           <a:prstGeom prst="roundRect">
             <a:avLst>
@@ -7284,8 +7284,8 @@
         </p:nvSpPr>
         <p:spPr>
           <a:xfrm>
-            <a:off x="685800" y="4617720"/>
-            <a:ext cx="3108960" cy="548640"/>
+            <a:off x="685800" y="4443984"/>
+            <a:ext cx="3108960" cy="512064"/>
           </a:xfrm>
           <a:prstGeom prst="rect">
             <a:avLst/>
@@ -7319,8 +7319,8 @@
         </p:nvSpPr>
         <p:spPr>
           <a:xfrm>
-            <a:off x="4069080" y="4617720"/>
-            <a:ext cx="2194560" cy="548640"/>
+            <a:off x="4069080" y="4443984"/>
+            <a:ext cx="2194560" cy="512064"/>
           </a:xfrm>
           <a:prstGeom prst="rect">
             <a:avLst/>
@@ -7354,8 +7354,8 @@
         </p:nvSpPr>
         <p:spPr>
           <a:xfrm>
-            <a:off x="6537960" y="4617720"/>
-            <a:ext cx="3154679" cy="548640"/>
+            <a:off x="6537960" y="4443984"/>
+            <a:ext cx="3154679" cy="512064"/>
           </a:xfrm>
           <a:prstGeom prst="rect">
             <a:avLst/>
@@ -7389,8 +7389,8 @@
         </p:nvSpPr>
         <p:spPr>
           <a:xfrm>
-            <a:off x="9966960" y="4617720"/>
-            <a:ext cx="1630375" cy="548640"/>
+            <a:off x="9966960" y="4443984"/>
+            <a:ext cx="1630375" cy="512064"/>
           </a:xfrm>
           <a:prstGeom prst="rect">
             <a:avLst/>
@@ -7424,8 +7424,8 @@
         </p:nvSpPr>
         <p:spPr>
           <a:xfrm>
-            <a:off x="548640" y="5257800"/>
-            <a:ext cx="11094415" cy="548640"/>
+            <a:off x="548640" y="5047488"/>
+            <a:ext cx="11094415" cy="512064"/>
           </a:xfrm>
           <a:prstGeom prst="roundRect">
             <a:avLst>
@@ -7468,8 +7468,8 @@
         </p:nvSpPr>
         <p:spPr>
           <a:xfrm>
-            <a:off x="685800" y="5257800"/>
-            <a:ext cx="3108960" cy="548640"/>
+            <a:off x="685800" y="5047488"/>
+            <a:ext cx="3108960" cy="512064"/>
           </a:xfrm>
           <a:prstGeom prst="rect">
             <a:avLst/>
@@ -7503,8 +7503,8 @@
         </p:nvSpPr>
         <p:spPr>
           <a:xfrm>
-            <a:off x="4069080" y="5257800"/>
-            <a:ext cx="2194560" cy="548640"/>
+            <a:off x="4069080" y="5047488"/>
+            <a:ext cx="2194560" cy="512064"/>
           </a:xfrm>
           <a:prstGeom prst="rect">
             <a:avLst/>
@@ -7538,8 +7538,8 @@
         </p:nvSpPr>
         <p:spPr>
           <a:xfrm>
-            <a:off x="6537960" y="5257800"/>
-            <a:ext cx="3154679" cy="548640"/>
+            <a:off x="6537960" y="5047488"/>
+            <a:ext cx="3154679" cy="512064"/>
           </a:xfrm>
           <a:prstGeom prst="rect">
             <a:avLst/>
@@ -7573,8 +7573,8 @@
         </p:nvSpPr>
         <p:spPr>
           <a:xfrm>
-            <a:off x="9966960" y="5257800"/>
-            <a:ext cx="1630375" cy="548640"/>
+            <a:off x="9966960" y="5047488"/>
+            <a:ext cx="1630375" cy="512064"/>
           </a:xfrm>
           <a:prstGeom prst="rect">
             <a:avLst/>
@@ -7608,8 +7608,8 @@
         </p:nvSpPr>
         <p:spPr>
           <a:xfrm>
-            <a:off x="548640" y="5989320"/>
-            <a:ext cx="11094415" cy="365760"/>
+            <a:off x="548640" y="5715000"/>
+            <a:ext cx="11094415" cy="548640"/>
           </a:xfrm>
           <a:prstGeom prst="rect">
             <a:avLst/>
@@ -7630,7 +7630,7 @@
                 </a:solidFill>
                 <a:latin typeface="Calibri"/>
               </a:rPr>
-              <a:t>Each apparent win disappeared once the resource it quietly used more of was matched.</a:t>
+              <a:t>Effects shrank or disappeared once seeds, training budgets, replay budgets and memory accounting were made fair; the homeostasis-DFA speed-up survived.</a:t>
             </a:r>
           </a:p>
         </p:txBody>
@@ -8690,7 +8690,7 @@
                 </a:solidFill>
                 <a:latin typeface="Calibri"/>
               </a:rPr>
-              <a:t>Transformer memory untested: no benchmark was learnable in budget</a:t>
+              <a:t>Transformer memory untested: no benchmark both required memory and was learnable in budget</a:t>
             </a:r>
           </a:p>
         </p:txBody>
@@ -9414,7 +9414,7 @@
                 </a:solidFill>
                 <a:latin typeface="Calibri"/>
               </a:rPr>
-              <a:t>homeostasis speeds up learning without backprop; a shared network is more memory-efficient with a small replay buffer</a:t>
+              <a:t>homeostasis speeds up learning without backprop; with a small replay buffer a shared network reaches similar mean accuracy in less than half the memory (3 seeds, wide CI)</a:t>
             </a:r>
           </a:p>
         </p:txBody>
@@ -9562,7 +9562,7 @@
                 </a:solidFill>
                 <a:latin typeface="Calibri"/>
               </a:rPr>
-              <a:t>every apparent win vanished once the resource it quietly used more of (seeds, frames, memory, replayed samples) was matched</a:t>
+              <a:t>effects shrank or disappeared once seeds, training budgets, replay budgets and memory accounting were made fair; the homeostasis-DFA speed-up survived</a:t>
             </a:r>
           </a:p>
         </p:txBody>
@@ -20213,7 +20213,7 @@
                 </a:solidFill>
                 <a:latin typeface="Calibri"/>
               </a:rPr>
-              <a:t>200 states/task: ties isolation in 0.89 vs 1.92 MB</a:t>
+              <a:t>200 states/task: similar mean ACC (0.838 vs 0.833; 3 seeds, wide CI) in 0.89 vs 1.92 MB</a:t>
             </a:r>
           </a:p>
         </p:txBody>
@@ -20382,7 +20382,7 @@
                 </a:solidFill>
                 <a:latin typeface="Calibri"/>
               </a:rPr>
-              <a:t>no learnable memory benchmark within budget</a:t>
+              <a:t>no benchmark both required memory and was learnable in budget</a:t>
             </a:r>
           </a:p>
         </p:txBody>
@@ -20569,8 +20569,8 @@
         </p:blipFill>
         <p:spPr>
           <a:xfrm>
-            <a:off x="457200" y="1685745"/>
-            <a:ext cx="7589520" cy="4400908"/>
+            <a:off x="457200" y="1690257"/>
+            <a:ext cx="7589520" cy="4391885"/>
           </a:xfrm>
           <a:prstGeom prst="rect">
             <a:avLst/>
@@ -20960,7 +20960,7 @@
                 </a:solidFill>
                 <a:latin typeface="Cambria"/>
               </a:rPr>
-              <a:t>A shared network wins only with a small replay buffer</a:t>
+              <a:t>A shared network is competitive only with a small buffer</a:t>
             </a:r>
           </a:p>
         </p:txBody>
@@ -20981,8 +20981,8 @@
         </p:blipFill>
         <p:spPr>
           <a:xfrm>
-            <a:off x="540409" y="1691640"/>
-            <a:ext cx="7605981" cy="3566160"/>
+            <a:off x="532580" y="1691640"/>
+            <a:ext cx="7621639" cy="3566160"/>
           </a:xfrm>
           <a:prstGeom prst="rect">
             <a:avLst/>
@@ -21093,7 +21093,7 @@
                 </a:solidFill>
                 <a:latin typeface="Calibri"/>
               </a:rPr>
-              <a:t>of the memory: SNN sleep with 200 states/task ties isolation (0.838 vs 0.833; 0.89 vs 1.92 MB)</a:t>
+              <a:t>of the memory: SNN sleep, 200 states/task, similar mean ACC to isolation (0.838 vs 0.833; 3 seeds, wide CI)</a:t>
             </a:r>
           </a:p>
         </p:txBody>

--- a/presentation/NeuroPlast_final_review.pptx
+++ b/presentation/NeuroPlast_final_review.pptx
@@ -5404,7 +5404,7 @@
         <p:spPr>
           <a:xfrm>
             <a:off x="640080" y="1371600"/>
-            <a:ext cx="10789920" cy="1828800"/>
+            <a:ext cx="11247120" cy="1828800"/>
           </a:xfrm>
           <a:prstGeom prst="rect">
             <a:avLst/>
@@ -5423,13 +5423,29 @@
               </a:lnSpc>
             </a:pPr>
             <a:r>
-              <a:rPr sz="3600" b="1" i="0">
+              <a:rPr sz="3200" b="1" i="0">
                 <a:solidFill>
                   <a:srgbClr val="FFFFFF"/>
                 </a:solidFill>
                 <a:latin typeface="Cambria"/>
               </a:rPr>
-              <a:t>Testing Brain-Inspired Mechanisms for Task-Incremental Continual Reinforcement Learning</a:t>
+              <a:t>Testing Brain-Inspired Mechanisms for</a:t>
+            </a:r>
+          </a:p>
+          <a:p>
+            <a:pPr algn="l">
+              <a:lnSpc>
+                <a:spcPct val="100000"/>
+              </a:lnSpc>
+            </a:pPr>
+            <a:r>
+              <a:rPr sz="3200" b="1" i="0">
+                <a:solidFill>
+                  <a:srgbClr val="FFFFFF"/>
+                </a:solidFill>
+                <a:latin typeface="Cambria"/>
+              </a:rPr>
+              <a:t>Task-Incremental Continual Reinforcement Learning</a:t>
             </a:r>
           </a:p>
         </p:txBody>
@@ -12765,7 +12781,11 @@
           </a:bodyPr>
           <a:lstStyle/>
           <a:p>
-            <a:pPr algn="l"/>
+            <a:pPr algn="l">
+              <a:lnSpc>
+                <a:spcPct val="100000"/>
+              </a:lnSpc>
+            </a:pPr>
             <a:r>
               <a:rPr sz="2800" b="1" i="0">
                 <a:solidFill>
@@ -12773,7 +12793,7 @@
                 </a:solidFill>
                 <a:latin typeface="Cambria"/>
               </a:rPr>
-              <a:t>No statistically reliable improvement beyond the matched controls</a:t>
+              <a:t>No statistically reliable improvement in final accuracy or forgetting beyond the matched controls</a:t>
             </a:r>
           </a:p>
         </p:txBody>
@@ -12786,7 +12806,7 @@
         </p:nvSpPr>
         <p:spPr>
           <a:xfrm>
-            <a:off x="640080" y="1691640"/>
+            <a:off x="640080" y="2057400"/>
             <a:ext cx="10972800" cy="457200"/>
           </a:xfrm>
           <a:prstGeom prst="rect">
@@ -12821,7 +12841,7 @@
         </p:nvSpPr>
         <p:spPr>
           <a:xfrm>
-            <a:off x="640080" y="2532888"/>
+            <a:off x="640080" y="2743200"/>
             <a:ext cx="384048" cy="384048"/>
           </a:xfrm>
           <a:prstGeom prst="ellipse">
@@ -12864,7 +12884,7 @@
         </p:nvSpPr>
         <p:spPr>
           <a:xfrm>
-            <a:off x="640080" y="2532888"/>
+            <a:off x="640080" y="2743200"/>
             <a:ext cx="384048" cy="384048"/>
           </a:xfrm>
           <a:prstGeom prst="rect">
@@ -12899,7 +12919,7 @@
         </p:nvSpPr>
         <p:spPr>
           <a:xfrm>
-            <a:off x="1234440" y="2496312"/>
+            <a:off x="1234440" y="2706624"/>
             <a:ext cx="2103120" cy="411480"/>
           </a:xfrm>
           <a:prstGeom prst="rect">
@@ -12934,7 +12954,7 @@
         </p:nvSpPr>
         <p:spPr>
           <a:xfrm>
-            <a:off x="3291840" y="2478024"/>
+            <a:off x="3291840" y="2688336"/>
             <a:ext cx="8321040" cy="731520"/>
           </a:xfrm>
           <a:prstGeom prst="rect">
@@ -12969,7 +12989,7 @@
         </p:nvSpPr>
         <p:spPr>
           <a:xfrm>
-            <a:off x="640080" y="3337560"/>
+            <a:off x="640080" y="3502152"/>
             <a:ext cx="384048" cy="384048"/>
           </a:xfrm>
           <a:prstGeom prst="ellipse">
@@ -13012,7 +13032,7 @@
         </p:nvSpPr>
         <p:spPr>
           <a:xfrm>
-            <a:off x="640080" y="3337560"/>
+            <a:off x="640080" y="3502152"/>
             <a:ext cx="384048" cy="384048"/>
           </a:xfrm>
           <a:prstGeom prst="rect">
@@ -13047,7 +13067,7 @@
         </p:nvSpPr>
         <p:spPr>
           <a:xfrm>
-            <a:off x="1234440" y="3300984"/>
+            <a:off x="1234440" y="3465576"/>
             <a:ext cx="2103120" cy="411480"/>
           </a:xfrm>
           <a:prstGeom prst="rect">
@@ -13082,7 +13102,7 @@
         </p:nvSpPr>
         <p:spPr>
           <a:xfrm>
-            <a:off x="3291840" y="3282696"/>
+            <a:off x="3291840" y="3447288"/>
             <a:ext cx="8321040" cy="731520"/>
           </a:xfrm>
           <a:prstGeom prst="rect">
@@ -13117,7 +13137,7 @@
         </p:nvSpPr>
         <p:spPr>
           <a:xfrm>
-            <a:off x="640080" y="4142231"/>
+            <a:off x="640080" y="4261103"/>
             <a:ext cx="384048" cy="384048"/>
           </a:xfrm>
           <a:prstGeom prst="ellipse">
@@ -13160,7 +13180,7 @@
         </p:nvSpPr>
         <p:spPr>
           <a:xfrm>
-            <a:off x="640080" y="4142231"/>
+            <a:off x="640080" y="4261103"/>
             <a:ext cx="384048" cy="384048"/>
           </a:xfrm>
           <a:prstGeom prst="rect">
@@ -13195,7 +13215,7 @@
         </p:nvSpPr>
         <p:spPr>
           <a:xfrm>
-            <a:off x="1234440" y="4105656"/>
+            <a:off x="1234440" y="4224528"/>
             <a:ext cx="2103120" cy="411480"/>
           </a:xfrm>
           <a:prstGeom prst="rect">
@@ -13230,7 +13250,7 @@
         </p:nvSpPr>
         <p:spPr>
           <a:xfrm>
-            <a:off x="3291840" y="4087368"/>
+            <a:off x="3291840" y="4206240"/>
             <a:ext cx="8321040" cy="731520"/>
           </a:xfrm>
           <a:prstGeom prst="rect">
@@ -13265,7 +13285,7 @@
         </p:nvSpPr>
         <p:spPr>
           <a:xfrm>
-            <a:off x="640080" y="4946904"/>
+            <a:off x="640080" y="5020055"/>
             <a:ext cx="384048" cy="384048"/>
           </a:xfrm>
           <a:prstGeom prst="ellipse">
@@ -13308,7 +13328,7 @@
         </p:nvSpPr>
         <p:spPr>
           <a:xfrm>
-            <a:off x="640080" y="4946904"/>
+            <a:off x="640080" y="5020055"/>
             <a:ext cx="384048" cy="384048"/>
           </a:xfrm>
           <a:prstGeom prst="rect">
@@ -13343,7 +13363,7 @@
         </p:nvSpPr>
         <p:spPr>
           <a:xfrm>
-            <a:off x="1234440" y="4910328"/>
+            <a:off x="1234440" y="4983480"/>
             <a:ext cx="2103120" cy="411480"/>
           </a:xfrm>
           <a:prstGeom prst="rect">
@@ -13378,7 +13398,7 @@
         </p:nvSpPr>
         <p:spPr>
           <a:xfrm>
-            <a:off x="3291840" y="4892040"/>
+            <a:off x="3291840" y="4965192"/>
             <a:ext cx="8321040" cy="731520"/>
           </a:xfrm>
           <a:prstGeom prst="rect">
@@ -22964,7 +22984,7 @@
                 </a:solidFill>
                 <a:latin typeface="Cambria"/>
               </a:rPr>
-              <a:t>No reliable improvement beyond the matched controls</a:t>
+              <a:t>No reliable improvement in final accuracy or forgetting beyond the matched controls</a:t>
             </a:r>
           </a:p>
         </p:txBody>
@@ -22977,7 +22997,7 @@
         </p:nvSpPr>
         <p:spPr>
           <a:xfrm>
-            <a:off x="731520" y="1719072"/>
+            <a:off x="731520" y="1810512"/>
             <a:ext cx="3291840" cy="274320"/>
           </a:xfrm>
           <a:prstGeom prst="rect">
@@ -23012,7 +23032,7 @@
         </p:nvSpPr>
         <p:spPr>
           <a:xfrm>
-            <a:off x="3840480" y="1719072"/>
+            <a:off x="3840480" y="1810512"/>
             <a:ext cx="3108960" cy="274320"/>
           </a:xfrm>
           <a:prstGeom prst="rect">
@@ -23047,7 +23067,7 @@
         </p:nvSpPr>
         <p:spPr>
           <a:xfrm>
-            <a:off x="7178040" y="1719072"/>
+            <a:off x="7178040" y="1810512"/>
             <a:ext cx="4572000" cy="274320"/>
           </a:xfrm>
           <a:prstGeom prst="rect">
@@ -23082,8 +23102,8 @@
         </p:nvSpPr>
         <p:spPr>
           <a:xfrm>
-            <a:off x="548640" y="2057400"/>
-            <a:ext cx="11094415" cy="512064"/>
+            <a:off x="548640" y="2148840"/>
+            <a:ext cx="11094415" cy="493776"/>
           </a:xfrm>
           <a:prstGeom prst="roundRect">
             <a:avLst>
@@ -23126,8 +23146,8 @@
         </p:nvSpPr>
         <p:spPr>
           <a:xfrm>
-            <a:off x="731520" y="2057400"/>
-            <a:ext cx="3200400" cy="512064"/>
+            <a:off x="731520" y="2148840"/>
+            <a:ext cx="3200400" cy="493776"/>
           </a:xfrm>
           <a:prstGeom prst="rect">
             <a:avLst/>
@@ -23161,7 +23181,7 @@
         </p:nvSpPr>
         <p:spPr>
           <a:xfrm>
-            <a:off x="3840480" y="2148840"/>
+            <a:off x="3840480" y="2240280"/>
             <a:ext cx="3154680" cy="365760"/>
           </a:xfrm>
           <a:prstGeom prst="roundRect">
@@ -23216,8 +23236,8 @@
         </p:nvSpPr>
         <p:spPr>
           <a:xfrm>
-            <a:off x="7178040" y="2057400"/>
-            <a:ext cx="4373575" cy="512064"/>
+            <a:off x="7178040" y="2148840"/>
+            <a:ext cx="4373575" cy="493776"/>
           </a:xfrm>
           <a:prstGeom prst="rect">
             <a:avLst/>
@@ -23251,8 +23271,8 @@
         </p:nvSpPr>
         <p:spPr>
           <a:xfrm>
-            <a:off x="548640" y="2660904"/>
-            <a:ext cx="11094415" cy="512064"/>
+            <a:off x="548640" y="2734056"/>
+            <a:ext cx="11094415" cy="493776"/>
           </a:xfrm>
           <a:prstGeom prst="roundRect">
             <a:avLst>
@@ -23295,8 +23315,8 @@
         </p:nvSpPr>
         <p:spPr>
           <a:xfrm>
-            <a:off x="731520" y="2660904"/>
-            <a:ext cx="3200400" cy="512064"/>
+            <a:off x="731520" y="2734056"/>
+            <a:ext cx="3200400" cy="493776"/>
           </a:xfrm>
           <a:prstGeom prst="rect">
             <a:avLst/>
@@ -23330,7 +23350,7 @@
         </p:nvSpPr>
         <p:spPr>
           <a:xfrm>
-            <a:off x="3840480" y="2752344"/>
+            <a:off x="3840480" y="2825496"/>
             <a:ext cx="3154680" cy="365760"/>
           </a:xfrm>
           <a:prstGeom prst="roundRect">
@@ -23385,8 +23405,8 @@
         </p:nvSpPr>
         <p:spPr>
           <a:xfrm>
-            <a:off x="7178040" y="2660904"/>
-            <a:ext cx="4373575" cy="512064"/>
+            <a:off x="7178040" y="2734056"/>
+            <a:ext cx="4373575" cy="493776"/>
           </a:xfrm>
           <a:prstGeom prst="rect">
             <a:avLst/>
@@ -23420,8 +23440,8 @@
         </p:nvSpPr>
         <p:spPr>
           <a:xfrm>
-            <a:off x="548640" y="3264408"/>
-            <a:ext cx="11094415" cy="512064"/>
+            <a:off x="548640" y="3319272"/>
+            <a:ext cx="11094415" cy="493776"/>
           </a:xfrm>
           <a:prstGeom prst="roundRect">
             <a:avLst>
@@ -23464,8 +23484,8 @@
         </p:nvSpPr>
         <p:spPr>
           <a:xfrm>
-            <a:off x="731520" y="3264408"/>
-            <a:ext cx="3200400" cy="512064"/>
+            <a:off x="731520" y="3319272"/>
+            <a:ext cx="3200400" cy="493776"/>
           </a:xfrm>
           <a:prstGeom prst="rect">
             <a:avLst/>
@@ -23499,7 +23519,7 @@
         </p:nvSpPr>
         <p:spPr>
           <a:xfrm>
-            <a:off x="3840480" y="3355848"/>
+            <a:off x="3840480" y="3410712"/>
             <a:ext cx="3154680" cy="365760"/>
           </a:xfrm>
           <a:prstGeom prst="roundRect">
@@ -23554,8 +23574,8 @@
         </p:nvSpPr>
         <p:spPr>
           <a:xfrm>
-            <a:off x="7178040" y="3264408"/>
-            <a:ext cx="4373575" cy="512064"/>
+            <a:off x="7178040" y="3319272"/>
+            <a:ext cx="4373575" cy="493776"/>
           </a:xfrm>
           <a:prstGeom prst="rect">
             <a:avLst/>
@@ -23589,8 +23609,8 @@
         </p:nvSpPr>
         <p:spPr>
           <a:xfrm>
-            <a:off x="548640" y="3867912"/>
-            <a:ext cx="11094415" cy="512064"/>
+            <a:off x="548640" y="3904487"/>
+            <a:ext cx="11094415" cy="493776"/>
           </a:xfrm>
           <a:prstGeom prst="roundRect">
             <a:avLst>
@@ -23633,8 +23653,8 @@
         </p:nvSpPr>
         <p:spPr>
           <a:xfrm>
-            <a:off x="731520" y="3867912"/>
-            <a:ext cx="3200400" cy="512064"/>
+            <a:off x="731520" y="3904487"/>
+            <a:ext cx="3200400" cy="493776"/>
           </a:xfrm>
           <a:prstGeom prst="rect">
             <a:avLst/>
@@ -23668,7 +23688,7 @@
         </p:nvSpPr>
         <p:spPr>
           <a:xfrm>
-            <a:off x="3840480" y="3959352"/>
+            <a:off x="3840480" y="3995927"/>
             <a:ext cx="3154680" cy="365760"/>
           </a:xfrm>
           <a:prstGeom prst="roundRect">
@@ -23723,8 +23743,8 @@
         </p:nvSpPr>
         <p:spPr>
           <a:xfrm>
-            <a:off x="7178040" y="3867912"/>
-            <a:ext cx="4373575" cy="512064"/>
+            <a:off x="7178040" y="3904487"/>
+            <a:ext cx="4373575" cy="493776"/>
           </a:xfrm>
           <a:prstGeom prst="rect">
             <a:avLst/>
@@ -23758,8 +23778,8 @@
         </p:nvSpPr>
         <p:spPr>
           <a:xfrm>
-            <a:off x="548640" y="4471416"/>
-            <a:ext cx="11094415" cy="512064"/>
+            <a:off x="548640" y="4489704"/>
+            <a:ext cx="11094415" cy="493776"/>
           </a:xfrm>
           <a:prstGeom prst="roundRect">
             <a:avLst>
@@ -23802,8 +23822,8 @@
         </p:nvSpPr>
         <p:spPr>
           <a:xfrm>
-            <a:off x="731520" y="4471416"/>
-            <a:ext cx="3200400" cy="512064"/>
+            <a:off x="731520" y="4489704"/>
+            <a:ext cx="3200400" cy="493776"/>
           </a:xfrm>
           <a:prstGeom prst="rect">
             <a:avLst/>
@@ -23837,7 +23857,7 @@
         </p:nvSpPr>
         <p:spPr>
           <a:xfrm>
-            <a:off x="3840480" y="4562856"/>
+            <a:off x="3840480" y="4581144"/>
             <a:ext cx="3154680" cy="365760"/>
           </a:xfrm>
           <a:prstGeom prst="roundRect">
@@ -23892,8 +23912,8 @@
         </p:nvSpPr>
         <p:spPr>
           <a:xfrm>
-            <a:off x="7178040" y="4471416"/>
-            <a:ext cx="4373575" cy="512064"/>
+            <a:off x="7178040" y="4489704"/>
+            <a:ext cx="4373575" cy="493776"/>
           </a:xfrm>
           <a:prstGeom prst="rect">
             <a:avLst/>
@@ -23928,7 +23948,7 @@
         <p:spPr>
           <a:xfrm>
             <a:off x="548640" y="5074920"/>
-            <a:ext cx="11094415" cy="512064"/>
+            <a:ext cx="11094415" cy="493776"/>
           </a:xfrm>
           <a:prstGeom prst="roundRect">
             <a:avLst>
@@ -23972,7 +23992,7 @@
         <p:spPr>
           <a:xfrm>
             <a:off x="731520" y="5074920"/>
-            <a:ext cx="3200400" cy="512064"/>
+            <a:ext cx="3200400" cy="493776"/>
           </a:xfrm>
           <a:prstGeom prst="rect">
             <a:avLst/>
@@ -24062,7 +24082,7 @@
         <p:spPr>
           <a:xfrm>
             <a:off x="7178040" y="5074920"/>
-            <a:ext cx="4373575" cy="512064"/>
+            <a:ext cx="4373575" cy="493776"/>
           </a:xfrm>
           <a:prstGeom prst="rect">
             <a:avLst/>
@@ -24096,8 +24116,8 @@
         </p:nvSpPr>
         <p:spPr>
           <a:xfrm>
-            <a:off x="548640" y="5678424"/>
-            <a:ext cx="11094415" cy="512064"/>
+            <a:off x="548640" y="5660136"/>
+            <a:ext cx="11094415" cy="493776"/>
           </a:xfrm>
           <a:prstGeom prst="roundRect">
             <a:avLst>
@@ -24140,8 +24160,8 @@
         </p:nvSpPr>
         <p:spPr>
           <a:xfrm>
-            <a:off x="731520" y="5678424"/>
-            <a:ext cx="3200400" cy="512064"/>
+            <a:off x="731520" y="5660136"/>
+            <a:ext cx="3200400" cy="493776"/>
           </a:xfrm>
           <a:prstGeom prst="rect">
             <a:avLst/>
@@ -24175,7 +24195,7 @@
         </p:nvSpPr>
         <p:spPr>
           <a:xfrm>
-            <a:off x="3840480" y="5769864"/>
+            <a:off x="3840480" y="5751575"/>
             <a:ext cx="3154680" cy="365760"/>
           </a:xfrm>
           <a:prstGeom prst="roundRect">
@@ -24230,8 +24250,8 @@
         </p:nvSpPr>
         <p:spPr>
           <a:xfrm>
-            <a:off x="7178040" y="5678424"/>
-            <a:ext cx="4373575" cy="512064"/>
+            <a:off x="7178040" y="5660136"/>
+            <a:ext cx="4373575" cy="493776"/>
           </a:xfrm>
           <a:prstGeom prst="rect">
             <a:avLst/>
@@ -24830,7 +24850,7 @@
                 </a:solidFill>
                 <a:latin typeface="Cambria"/>
               </a:rPr>
-              <a:t>A shared trunk is competitive only with a small buffer and full-width isolation</a:t>
+              <a:t>A shared trunk is competitive only with a small buffer, and only against full-width isolation</a:t>
             </a:r>
           </a:p>
         </p:txBody>
